--- a/esp32/ESP32-S3-LedFade.pptx
+++ b/esp32/ESP32-S3-LedFade.pptx
@@ -259,7 +259,7 @@
           <a:p>
             <a:fld id="{58E51502-AB75-4020-8B3D-592664152A41}" type="datetimeFigureOut">
               <a:rPr lang="en-US" smtClean="0"/>
-              <a:t>5/12/2026</a:t>
+              <a:t>5/13/2026</a:t>
             </a:fld>
             <a:endParaRPr lang="en-US"/>
           </a:p>
@@ -457,7 +457,7 @@
           <a:p>
             <a:fld id="{58E51502-AB75-4020-8B3D-592664152A41}" type="datetimeFigureOut">
               <a:rPr lang="en-US" smtClean="0"/>
-              <a:t>5/12/2026</a:t>
+              <a:t>5/13/2026</a:t>
             </a:fld>
             <a:endParaRPr lang="en-US"/>
           </a:p>
@@ -665,7 +665,7 @@
           <a:p>
             <a:fld id="{58E51502-AB75-4020-8B3D-592664152A41}" type="datetimeFigureOut">
               <a:rPr lang="en-US" smtClean="0"/>
-              <a:t>5/12/2026</a:t>
+              <a:t>5/13/2026</a:t>
             </a:fld>
             <a:endParaRPr lang="en-US"/>
           </a:p>
@@ -863,7 +863,7 @@
           <a:p>
             <a:fld id="{58E51502-AB75-4020-8B3D-592664152A41}" type="datetimeFigureOut">
               <a:rPr lang="en-US" smtClean="0"/>
-              <a:t>5/12/2026</a:t>
+              <a:t>5/13/2026</a:t>
             </a:fld>
             <a:endParaRPr lang="en-US"/>
           </a:p>
@@ -1138,7 +1138,7 @@
           <a:p>
             <a:fld id="{58E51502-AB75-4020-8B3D-592664152A41}" type="datetimeFigureOut">
               <a:rPr lang="en-US" smtClean="0"/>
-              <a:t>5/12/2026</a:t>
+              <a:t>5/13/2026</a:t>
             </a:fld>
             <a:endParaRPr lang="en-US"/>
           </a:p>
@@ -1403,7 +1403,7 @@
           <a:p>
             <a:fld id="{58E51502-AB75-4020-8B3D-592664152A41}" type="datetimeFigureOut">
               <a:rPr lang="en-US" smtClean="0"/>
-              <a:t>5/12/2026</a:t>
+              <a:t>5/13/2026</a:t>
             </a:fld>
             <a:endParaRPr lang="en-US"/>
           </a:p>
@@ -1815,7 +1815,7 @@
           <a:p>
             <a:fld id="{58E51502-AB75-4020-8B3D-592664152A41}" type="datetimeFigureOut">
               <a:rPr lang="en-US" smtClean="0"/>
-              <a:t>5/12/2026</a:t>
+              <a:t>5/13/2026</a:t>
             </a:fld>
             <a:endParaRPr lang="en-US"/>
           </a:p>
@@ -1956,7 +1956,7 @@
           <a:p>
             <a:fld id="{58E51502-AB75-4020-8B3D-592664152A41}" type="datetimeFigureOut">
               <a:rPr lang="en-US" smtClean="0"/>
-              <a:t>5/12/2026</a:t>
+              <a:t>5/13/2026</a:t>
             </a:fld>
             <a:endParaRPr lang="en-US"/>
           </a:p>
@@ -2069,7 +2069,7 @@
           <a:p>
             <a:fld id="{58E51502-AB75-4020-8B3D-592664152A41}" type="datetimeFigureOut">
               <a:rPr lang="en-US" smtClean="0"/>
-              <a:t>5/12/2026</a:t>
+              <a:t>5/13/2026</a:t>
             </a:fld>
             <a:endParaRPr lang="en-US"/>
           </a:p>
@@ -2380,7 +2380,7 @@
           <a:p>
             <a:fld id="{58E51502-AB75-4020-8B3D-592664152A41}" type="datetimeFigureOut">
               <a:rPr lang="en-US" smtClean="0"/>
-              <a:t>5/12/2026</a:t>
+              <a:t>5/13/2026</a:t>
             </a:fld>
             <a:endParaRPr lang="en-US"/>
           </a:p>
@@ -2668,7 +2668,7 @@
           <a:p>
             <a:fld id="{58E51502-AB75-4020-8B3D-592664152A41}" type="datetimeFigureOut">
               <a:rPr lang="en-US" smtClean="0"/>
-              <a:t>5/12/2026</a:t>
+              <a:t>5/13/2026</a:t>
             </a:fld>
             <a:endParaRPr lang="en-US"/>
           </a:p>
@@ -2909,7 +2909,7 @@
           <a:p>
             <a:fld id="{58E51502-AB75-4020-8B3D-592664152A41}" type="datetimeFigureOut">
               <a:rPr lang="en-US" smtClean="0"/>
-              <a:t>5/12/2026</a:t>
+              <a:t>5/13/2026</a:t>
             </a:fld>
             <a:endParaRPr lang="en-US"/>
           </a:p>
@@ -3438,8 +3438,8 @@
         </p:nvSpPr>
         <p:spPr>
           <a:xfrm>
-            <a:off x="2728339" y="383542"/>
-            <a:ext cx="6735322" cy="646331"/>
+            <a:off x="2684737" y="383542"/>
+            <a:ext cx="6822527" cy="646331"/>
           </a:xfrm>
           <a:prstGeom prst="rect">
             <a:avLst/>
@@ -3457,7 +3457,7 @@
               <a:rPr lang="en-US" sz="3600" dirty="0">
                 <a:latin typeface="Bebas Neue" panose="020B0606020202050201" pitchFamily="34" charset="0"/>
               </a:rPr>
-              <a:t>ESP32-S3 feather Blinky Circuit Diagrams</a:t>
+              <a:t>ESP32-S3 feather LED Fade Circuit Diagrams</a:t>
             </a:r>
           </a:p>
         </p:txBody>
@@ -3608,8 +3608,8 @@
         </p:nvSpPr>
         <p:spPr>
           <a:xfrm>
-            <a:off x="3126297" y="881566"/>
-            <a:ext cx="5939406" cy="338554"/>
+            <a:off x="2684737" y="881566"/>
+            <a:ext cx="6822527" cy="338554"/>
           </a:xfrm>
           <a:prstGeom prst="rect">
             <a:avLst/>
@@ -3627,7 +3627,7 @@
               <a:rPr lang="en-US" sz="1600" dirty="0">
                 <a:latin typeface="Segoe Condensed" panose="020B0606040200020203" pitchFamily="34" charset="0"/>
               </a:rPr>
-              <a:t>Wire up LED to GPIO Pin 13 with a 220</a:t>
+              <a:t>Same diagram as blinky. Wire up LED to GPIO Pin 13 with a 220</a:t>
             </a:r>
             <a:r>
               <a:rPr lang="el-GR" sz="1600" dirty="0">
